--- a/docs/휴가증 자동 반영 프로그램 안내 (서무용).pptx
+++ b/docs/휴가증 자동 반영 프로그램 안내 (서무용).pptx
@@ -3496,8 +3496,8 @@
         </p:nvSpPr>
         <p:spPr>
           <a:xfrm>
-            <a:off x="731520" y="1783080"/>
-            <a:ext cx="3566160" cy="2651760"/>
+            <a:off x="655167" y="1783080"/>
+            <a:ext cx="3444240" cy="2651760"/>
           </a:xfrm>
           <a:prstGeom prst="roundRect">
             <a:avLst>
@@ -3542,8 +3542,8 @@
         </p:nvSpPr>
         <p:spPr>
           <a:xfrm>
-            <a:off x="731520" y="1965960"/>
-            <a:ext cx="3566160" cy="640080"/>
+            <a:off x="655167" y="1965960"/>
+            <a:ext cx="3444240" cy="640080"/>
           </a:xfrm>
           <a:prstGeom prst="rect">
             <a:avLst/>
@@ -3577,8 +3577,8 @@
         </p:nvSpPr>
         <p:spPr>
           <a:xfrm>
-            <a:off x="731520" y="2743200"/>
-            <a:ext cx="3566160" cy="457200"/>
+            <a:off x="655167" y="2743200"/>
+            <a:ext cx="3444240" cy="457200"/>
           </a:xfrm>
           <a:prstGeom prst="rect">
             <a:avLst/>
@@ -3612,8 +3612,8 @@
         </p:nvSpPr>
         <p:spPr>
           <a:xfrm>
-            <a:off x="731520" y="3291840"/>
-            <a:ext cx="3566160" cy="1005840"/>
+            <a:off x="655167" y="3291840"/>
+            <a:ext cx="3444240" cy="1005840"/>
           </a:xfrm>
           <a:prstGeom prst="rect">
             <a:avLst/>
@@ -3648,8 +3648,8 @@
         </p:nvSpPr>
         <p:spPr>
           <a:xfrm>
-            <a:off x="4572000" y="1783080"/>
-            <a:ext cx="3566160" cy="2651760"/>
+            <a:off x="4373727" y="1783080"/>
+            <a:ext cx="3444240" cy="2651760"/>
           </a:xfrm>
           <a:prstGeom prst="roundRect">
             <a:avLst>
@@ -3694,8 +3694,8 @@
         </p:nvSpPr>
         <p:spPr>
           <a:xfrm>
-            <a:off x="4572000" y="1965960"/>
-            <a:ext cx="3566160" cy="640080"/>
+            <a:off x="4373727" y="1965960"/>
+            <a:ext cx="3444240" cy="640080"/>
           </a:xfrm>
           <a:prstGeom prst="rect">
             <a:avLst/>
@@ -3729,8 +3729,8 @@
         </p:nvSpPr>
         <p:spPr>
           <a:xfrm>
-            <a:off x="4572000" y="2743200"/>
-            <a:ext cx="3566160" cy="457200"/>
+            <a:off x="4373727" y="2743200"/>
+            <a:ext cx="3444240" cy="457200"/>
           </a:xfrm>
           <a:prstGeom prst="rect">
             <a:avLst/>
@@ -3764,8 +3764,8 @@
         </p:nvSpPr>
         <p:spPr>
           <a:xfrm>
-            <a:off x="4572000" y="3291840"/>
-            <a:ext cx="3566160" cy="1005840"/>
+            <a:off x="4373727" y="3291840"/>
+            <a:ext cx="3444240" cy="1005840"/>
           </a:xfrm>
           <a:prstGeom prst="rect">
             <a:avLst/>
@@ -3800,8 +3800,8 @@
         </p:nvSpPr>
         <p:spPr>
           <a:xfrm>
-            <a:off x="8412480" y="1783080"/>
-            <a:ext cx="3566160" cy="2651760"/>
+            <a:off x="8092287" y="1783080"/>
+            <a:ext cx="3444240" cy="2651760"/>
           </a:xfrm>
           <a:prstGeom prst="roundRect">
             <a:avLst>
@@ -3846,8 +3846,8 @@
         </p:nvSpPr>
         <p:spPr>
           <a:xfrm>
-            <a:off x="8412480" y="1965960"/>
-            <a:ext cx="3566160" cy="640080"/>
+            <a:off x="8092287" y="1965960"/>
+            <a:ext cx="3444240" cy="640080"/>
           </a:xfrm>
           <a:prstGeom prst="rect">
             <a:avLst/>
@@ -3881,8 +3881,8 @@
         </p:nvSpPr>
         <p:spPr>
           <a:xfrm>
-            <a:off x="8412480" y="2743200"/>
-            <a:ext cx="3566160" cy="457200"/>
+            <a:off x="8092287" y="2743200"/>
+            <a:ext cx="3444240" cy="457200"/>
           </a:xfrm>
           <a:prstGeom prst="rect">
             <a:avLst/>
@@ -3916,8 +3916,8 @@
         </p:nvSpPr>
         <p:spPr>
           <a:xfrm>
-            <a:off x="8412480" y="3291840"/>
-            <a:ext cx="3566160" cy="1005840"/>
+            <a:off x="8092287" y="3291840"/>
+            <a:ext cx="3444240" cy="1005840"/>
           </a:xfrm>
           <a:prstGeom prst="rect">
             <a:avLst/>
@@ -3952,7 +3952,7 @@
         </p:nvSpPr>
         <p:spPr>
           <a:xfrm>
-            <a:off x="731520" y="4709160"/>
+            <a:off x="655167" y="4709160"/>
             <a:ext cx="10881360" cy="777240"/>
           </a:xfrm>
           <a:prstGeom prst="roundRect">
@@ -3998,7 +3998,7 @@
         </p:nvSpPr>
         <p:spPr>
           <a:xfrm>
-            <a:off x="1005840" y="4709160"/>
+            <a:off x="929487" y="4709160"/>
             <a:ext cx="10332720" cy="777240"/>
           </a:xfrm>
           <a:prstGeom prst="rect">
@@ -4033,7 +4033,7 @@
         </p:nvSpPr>
         <p:spPr>
           <a:xfrm>
-            <a:off x="731520" y="5623560"/>
+            <a:off x="655167" y="5623560"/>
             <a:ext cx="10881360" cy="685800"/>
           </a:xfrm>
           <a:prstGeom prst="roundRect">
@@ -4079,7 +4079,7 @@
         </p:nvSpPr>
         <p:spPr>
           <a:xfrm>
-            <a:off x="1005840" y="5623560"/>
+            <a:off x="929487" y="5623560"/>
             <a:ext cx="10332720" cy="685800"/>
           </a:xfrm>
           <a:prstGeom prst="rect">
@@ -4281,8 +4281,8 @@
         </p:nvSpPr>
         <p:spPr>
           <a:xfrm>
-            <a:off x="731520" y="1920240"/>
-            <a:ext cx="5212080" cy="2286000"/>
+            <a:off x="655167" y="1920240"/>
+            <a:ext cx="5303520" cy="2286000"/>
           </a:xfrm>
           <a:prstGeom prst="roundRect">
             <a:avLst>
@@ -4327,7 +4327,7 @@
         </p:nvSpPr>
         <p:spPr>
           <a:xfrm>
-            <a:off x="914400" y="2103120"/>
+            <a:off x="883767" y="2103120"/>
             <a:ext cx="4846320" cy="457200"/>
           </a:xfrm>
           <a:prstGeom prst="rect">
@@ -4362,7 +4362,7 @@
         </p:nvSpPr>
         <p:spPr>
           <a:xfrm>
-            <a:off x="914400" y="2697480"/>
+            <a:off x="883767" y="2697480"/>
             <a:ext cx="4846320" cy="1371600"/>
           </a:xfrm>
           <a:prstGeom prst="rect">
@@ -4384,8 +4384,7 @@
                 </a:solidFill>
                 <a:latin typeface="맑은 고딕"/>
               </a:rPr>
-              <a:t>• 잔여가 안 맞으면
-   명단에서 손으로 고침
+              <a:t>• 잔여가 안 맞으면 명단에서 손으로 고침
 • 매번 확인이 필요했음</a:t>
             </a:r>
           </a:p>
@@ -4399,8 +4398,8 @@
         </p:nvSpPr>
         <p:spPr>
           <a:xfrm>
-            <a:off x="6217920" y="1920240"/>
-            <a:ext cx="5212080" cy="2286000"/>
+            <a:off x="6233007" y="1920240"/>
+            <a:ext cx="5303520" cy="2286000"/>
           </a:xfrm>
           <a:prstGeom prst="roundRect">
             <a:avLst>
@@ -4445,7 +4444,7 @@
         </p:nvSpPr>
         <p:spPr>
           <a:xfrm>
-            <a:off x="6400800" y="2103120"/>
+            <a:off x="6461607" y="2103120"/>
             <a:ext cx="4846320" cy="457200"/>
           </a:xfrm>
           <a:prstGeom prst="rect">
@@ -4480,7 +4479,7 @@
         </p:nvSpPr>
         <p:spPr>
           <a:xfrm>
-            <a:off x="6400800" y="2697480"/>
+            <a:off x="6461607" y="2697480"/>
             <a:ext cx="4846320" cy="1371600"/>
           </a:xfrm>
           <a:prstGeom prst="rect">
@@ -4517,7 +4516,7 @@
         </p:nvSpPr>
         <p:spPr>
           <a:xfrm>
-            <a:off x="731520" y="4434840"/>
+            <a:off x="655167" y="4434840"/>
             <a:ext cx="10881360" cy="914400"/>
           </a:xfrm>
           <a:prstGeom prst="roundRect">
@@ -4563,7 +4562,7 @@
         </p:nvSpPr>
         <p:spPr>
           <a:xfrm>
-            <a:off x="1005840" y="4434840"/>
+            <a:off x="929487" y="4434840"/>
             <a:ext cx="10332720" cy="914400"/>
           </a:xfrm>
           <a:prstGeom prst="rect">
@@ -4599,7 +4598,7 @@
         </p:nvSpPr>
         <p:spPr>
           <a:xfrm>
-            <a:off x="731520" y="5486400"/>
+            <a:off x="655167" y="5486400"/>
             <a:ext cx="10881360" cy="822960"/>
           </a:xfrm>
           <a:prstGeom prst="roundRect">
@@ -4645,7 +4644,7 @@
         </p:nvSpPr>
         <p:spPr>
           <a:xfrm>
-            <a:off x="1005840" y="5486400"/>
+            <a:off x="929487" y="5486400"/>
             <a:ext cx="10332720" cy="822960"/>
           </a:xfrm>
           <a:prstGeom prst="rect">
@@ -4848,8 +4847,8 @@
         </p:nvSpPr>
         <p:spPr>
           <a:xfrm>
-            <a:off x="731520" y="1828800"/>
-            <a:ext cx="5212080" cy="2651760"/>
+            <a:off x="655167" y="1828800"/>
+            <a:ext cx="5303520" cy="2651760"/>
           </a:xfrm>
           <a:prstGeom prst="roundRect">
             <a:avLst>
@@ -4894,8 +4893,8 @@
         </p:nvSpPr>
         <p:spPr>
           <a:xfrm>
-            <a:off x="960120" y="2011680"/>
-            <a:ext cx="4754880" cy="457200"/>
+            <a:off x="883767" y="2011680"/>
+            <a:ext cx="4846320" cy="457200"/>
           </a:xfrm>
           <a:prstGeom prst="rect">
             <a:avLst/>
@@ -4929,8 +4928,8 @@
         </p:nvSpPr>
         <p:spPr>
           <a:xfrm>
-            <a:off x="960120" y="2651760"/>
-            <a:ext cx="4754880" cy="1645920"/>
+            <a:off x="883767" y="2651760"/>
+            <a:ext cx="4846320" cy="1645920"/>
           </a:xfrm>
           <a:prstGeom prst="rect">
             <a:avLst/>
@@ -4966,8 +4965,8 @@
         </p:nvSpPr>
         <p:spPr>
           <a:xfrm>
-            <a:off x="6217920" y="1828800"/>
-            <a:ext cx="5212080" cy="2651760"/>
+            <a:off x="6233007" y="1828800"/>
+            <a:ext cx="5303520" cy="2651760"/>
           </a:xfrm>
           <a:prstGeom prst="roundRect">
             <a:avLst>
@@ -5012,8 +5011,8 @@
         </p:nvSpPr>
         <p:spPr>
           <a:xfrm>
-            <a:off x="6446520" y="2011680"/>
-            <a:ext cx="4754880" cy="457200"/>
+            <a:off x="6461607" y="2011680"/>
+            <a:ext cx="4846320" cy="457200"/>
           </a:xfrm>
           <a:prstGeom prst="rect">
             <a:avLst/>
@@ -5047,8 +5046,8 @@
         </p:nvSpPr>
         <p:spPr>
           <a:xfrm>
-            <a:off x="6446520" y="2651760"/>
-            <a:ext cx="4754880" cy="1645920"/>
+            <a:off x="6461607" y="2651760"/>
+            <a:ext cx="4846320" cy="1645920"/>
           </a:xfrm>
           <a:prstGeom prst="rect">
             <a:avLst/>
@@ -5084,7 +5083,7 @@
         </p:nvSpPr>
         <p:spPr>
           <a:xfrm>
-            <a:off x="731520" y="4754880"/>
+            <a:off x="655167" y="4754880"/>
             <a:ext cx="10881360" cy="1234440"/>
           </a:xfrm>
           <a:prstGeom prst="roundRect">
@@ -5130,7 +5129,7 @@
         </p:nvSpPr>
         <p:spPr>
           <a:xfrm>
-            <a:off x="1005840" y="4754880"/>
+            <a:off x="929487" y="4754880"/>
             <a:ext cx="10332720" cy="1234440"/>
           </a:xfrm>
           <a:prstGeom prst="rect">
@@ -5333,8 +5332,8 @@
         </p:nvSpPr>
         <p:spPr>
           <a:xfrm>
-            <a:off x="640080" y="1828800"/>
-            <a:ext cx="2697480" cy="2651760"/>
+            <a:off x="655167" y="1828800"/>
+            <a:ext cx="2514600" cy="2651760"/>
           </a:xfrm>
           <a:prstGeom prst="roundRect">
             <a:avLst>
@@ -5379,8 +5378,8 @@
         </p:nvSpPr>
         <p:spPr>
           <a:xfrm>
-            <a:off x="640080" y="2011680"/>
-            <a:ext cx="2697480" cy="548640"/>
+            <a:off x="655167" y="2011680"/>
+            <a:ext cx="2514600" cy="548640"/>
           </a:xfrm>
           <a:prstGeom prst="rect">
             <a:avLst/>
@@ -5414,8 +5413,8 @@
         </p:nvSpPr>
         <p:spPr>
           <a:xfrm>
-            <a:off x="640080" y="2697480"/>
-            <a:ext cx="2697480" cy="457200"/>
+            <a:off x="655167" y="2697480"/>
+            <a:ext cx="2514600" cy="457200"/>
           </a:xfrm>
           <a:prstGeom prst="rect">
             <a:avLst/>
@@ -5449,8 +5448,8 @@
         </p:nvSpPr>
         <p:spPr>
           <a:xfrm>
-            <a:off x="640080" y="3246120"/>
-            <a:ext cx="2697480" cy="1097280"/>
+            <a:off x="655167" y="3246120"/>
+            <a:ext cx="2514600" cy="1097280"/>
           </a:xfrm>
           <a:prstGeom prst="rect">
             <a:avLst/>
@@ -5485,8 +5484,8 @@
         </p:nvSpPr>
         <p:spPr>
           <a:xfrm>
-            <a:off x="3520439" y="1828800"/>
-            <a:ext cx="2697480" cy="2651760"/>
+            <a:off x="3444087" y="1828800"/>
+            <a:ext cx="2514600" cy="2651760"/>
           </a:xfrm>
           <a:prstGeom prst="roundRect">
             <a:avLst>
@@ -5531,8 +5530,8 @@
         </p:nvSpPr>
         <p:spPr>
           <a:xfrm>
-            <a:off x="3520439" y="2011680"/>
-            <a:ext cx="2697480" cy="548640"/>
+            <a:off x="3444087" y="2011680"/>
+            <a:ext cx="2514600" cy="548640"/>
           </a:xfrm>
           <a:prstGeom prst="rect">
             <a:avLst/>
@@ -5566,8 +5565,8 @@
         </p:nvSpPr>
         <p:spPr>
           <a:xfrm>
-            <a:off x="3520439" y="2697480"/>
-            <a:ext cx="2697480" cy="457200"/>
+            <a:off x="3444087" y="2697480"/>
+            <a:ext cx="2514600" cy="457200"/>
           </a:xfrm>
           <a:prstGeom prst="rect">
             <a:avLst/>
@@ -5601,8 +5600,8 @@
         </p:nvSpPr>
         <p:spPr>
           <a:xfrm>
-            <a:off x="3520439" y="3246120"/>
-            <a:ext cx="2697480" cy="1097280"/>
+            <a:off x="3444087" y="3246120"/>
+            <a:ext cx="2514600" cy="1097280"/>
           </a:xfrm>
           <a:prstGeom prst="rect">
             <a:avLst/>
@@ -5637,8 +5636,8 @@
         </p:nvSpPr>
         <p:spPr>
           <a:xfrm>
-            <a:off x="6400800" y="1828800"/>
-            <a:ext cx="2697480" cy="2651760"/>
+            <a:off x="6233007" y="1828800"/>
+            <a:ext cx="2514600" cy="2651760"/>
           </a:xfrm>
           <a:prstGeom prst="roundRect">
             <a:avLst>
@@ -5683,8 +5682,8 @@
         </p:nvSpPr>
         <p:spPr>
           <a:xfrm>
-            <a:off x="6400800" y="2011680"/>
-            <a:ext cx="2697480" cy="548640"/>
+            <a:off x="6233007" y="2011680"/>
+            <a:ext cx="2514600" cy="548640"/>
           </a:xfrm>
           <a:prstGeom prst="rect">
             <a:avLst/>
@@ -5718,8 +5717,8 @@
         </p:nvSpPr>
         <p:spPr>
           <a:xfrm>
-            <a:off x="6400800" y="2697480"/>
-            <a:ext cx="2697480" cy="457200"/>
+            <a:off x="6233007" y="2697480"/>
+            <a:ext cx="2514600" cy="457200"/>
           </a:xfrm>
           <a:prstGeom prst="rect">
             <a:avLst/>
@@ -5753,8 +5752,8 @@
         </p:nvSpPr>
         <p:spPr>
           <a:xfrm>
-            <a:off x="6400800" y="3246120"/>
-            <a:ext cx="2697480" cy="1097280"/>
+            <a:off x="6233007" y="3246120"/>
+            <a:ext cx="2514600" cy="1097280"/>
           </a:xfrm>
           <a:prstGeom prst="rect">
             <a:avLst/>
@@ -5789,8 +5788,8 @@
         </p:nvSpPr>
         <p:spPr>
           <a:xfrm>
-            <a:off x="9281159" y="1828800"/>
-            <a:ext cx="2697480" cy="2651760"/>
+            <a:off x="9021927" y="1828800"/>
+            <a:ext cx="2514600" cy="2651760"/>
           </a:xfrm>
           <a:prstGeom prst="roundRect">
             <a:avLst>
@@ -5835,8 +5834,8 @@
         </p:nvSpPr>
         <p:spPr>
           <a:xfrm>
-            <a:off x="9281159" y="2011680"/>
-            <a:ext cx="2697480" cy="548640"/>
+            <a:off x="9021927" y="2011680"/>
+            <a:ext cx="2514600" cy="548640"/>
           </a:xfrm>
           <a:prstGeom prst="rect">
             <a:avLst/>
@@ -5870,8 +5869,8 @@
         </p:nvSpPr>
         <p:spPr>
           <a:xfrm>
-            <a:off x="9281159" y="2697480"/>
-            <a:ext cx="2697480" cy="457200"/>
+            <a:off x="9021927" y="2697480"/>
+            <a:ext cx="2514600" cy="457200"/>
           </a:xfrm>
           <a:prstGeom prst="rect">
             <a:avLst/>
@@ -5905,8 +5904,8 @@
         </p:nvSpPr>
         <p:spPr>
           <a:xfrm>
-            <a:off x="9281159" y="3246120"/>
-            <a:ext cx="2697480" cy="1097280"/>
+            <a:off x="9021927" y="3246120"/>
+            <a:ext cx="2514600" cy="1097280"/>
           </a:xfrm>
           <a:prstGeom prst="rect">
             <a:avLst/>
@@ -5941,7 +5940,7 @@
         </p:nvSpPr>
         <p:spPr>
           <a:xfrm>
-            <a:off x="731520" y="4800600"/>
+            <a:off x="655167" y="4800600"/>
             <a:ext cx="10881360" cy="1188720"/>
           </a:xfrm>
           <a:prstGeom prst="roundRect">
@@ -5987,7 +5986,7 @@
         </p:nvSpPr>
         <p:spPr>
           <a:xfrm>
-            <a:off x="1005840" y="4800600"/>
+            <a:off x="929487" y="4800600"/>
             <a:ext cx="10332720" cy="1188720"/>
           </a:xfrm>
           <a:prstGeom prst="rect">
@@ -6155,7 +6154,7 @@
         </p:nvSpPr>
         <p:spPr>
           <a:xfrm>
-            <a:off x="731520" y="1234440"/>
+            <a:off x="655167" y="1234440"/>
             <a:ext cx="10881360" cy="713232"/>
           </a:xfrm>
           <a:prstGeom prst="roundRect">
@@ -6201,8 +6200,8 @@
         </p:nvSpPr>
         <p:spPr>
           <a:xfrm>
-            <a:off x="1005840" y="1234440"/>
-            <a:ext cx="4846320" cy="713232"/>
+            <a:off x="929487" y="1234440"/>
+            <a:ext cx="4754880" cy="713232"/>
           </a:xfrm>
           <a:prstGeom prst="rect">
             <a:avLst/>
@@ -6236,8 +6235,8 @@
         </p:nvSpPr>
         <p:spPr>
           <a:xfrm>
-            <a:off x="6035040" y="1234440"/>
-            <a:ext cx="5394960" cy="713232"/>
+            <a:off x="5958687" y="1234440"/>
+            <a:ext cx="5303520" cy="713232"/>
           </a:xfrm>
           <a:prstGeom prst="rect">
             <a:avLst/>
@@ -6271,7 +6270,7 @@
         </p:nvSpPr>
         <p:spPr>
           <a:xfrm>
-            <a:off x="731520" y="2075688"/>
+            <a:off x="655167" y="2075688"/>
             <a:ext cx="10881360" cy="713232"/>
           </a:xfrm>
           <a:prstGeom prst="roundRect">
@@ -6317,8 +6316,8 @@
         </p:nvSpPr>
         <p:spPr>
           <a:xfrm>
-            <a:off x="1005840" y="2075688"/>
-            <a:ext cx="4846320" cy="713232"/>
+            <a:off x="929487" y="2075688"/>
+            <a:ext cx="4754880" cy="713232"/>
           </a:xfrm>
           <a:prstGeom prst="rect">
             <a:avLst/>
@@ -6352,8 +6351,8 @@
         </p:nvSpPr>
         <p:spPr>
           <a:xfrm>
-            <a:off x="6035040" y="2075688"/>
-            <a:ext cx="5394960" cy="713232"/>
+            <a:off x="5958687" y="2075688"/>
+            <a:ext cx="5303520" cy="713232"/>
           </a:xfrm>
           <a:prstGeom prst="rect">
             <a:avLst/>
@@ -6387,7 +6386,7 @@
         </p:nvSpPr>
         <p:spPr>
           <a:xfrm>
-            <a:off x="731520" y="2916936"/>
+            <a:off x="655167" y="2916936"/>
             <a:ext cx="10881360" cy="713232"/>
           </a:xfrm>
           <a:prstGeom prst="roundRect">
@@ -6433,8 +6432,8 @@
         </p:nvSpPr>
         <p:spPr>
           <a:xfrm>
-            <a:off x="1005840" y="2916936"/>
-            <a:ext cx="4846320" cy="713232"/>
+            <a:off x="929487" y="2916936"/>
+            <a:ext cx="4754880" cy="713232"/>
           </a:xfrm>
           <a:prstGeom prst="rect">
             <a:avLst/>
@@ -6468,8 +6467,8 @@
         </p:nvSpPr>
         <p:spPr>
           <a:xfrm>
-            <a:off x="6035040" y="2916936"/>
-            <a:ext cx="5394960" cy="713232"/>
+            <a:off x="5958687" y="2916936"/>
+            <a:ext cx="5303520" cy="713232"/>
           </a:xfrm>
           <a:prstGeom prst="rect">
             <a:avLst/>
@@ -6503,7 +6502,7 @@
         </p:nvSpPr>
         <p:spPr>
           <a:xfrm>
-            <a:off x="731520" y="3758184"/>
+            <a:off x="655167" y="3758184"/>
             <a:ext cx="10881360" cy="713232"/>
           </a:xfrm>
           <a:prstGeom prst="roundRect">
@@ -6549,8 +6548,8 @@
         </p:nvSpPr>
         <p:spPr>
           <a:xfrm>
-            <a:off x="1005840" y="3758184"/>
-            <a:ext cx="4846320" cy="713232"/>
+            <a:off x="929487" y="3758184"/>
+            <a:ext cx="4754880" cy="713232"/>
           </a:xfrm>
           <a:prstGeom prst="rect">
             <a:avLst/>
@@ -6584,8 +6583,8 @@
         </p:nvSpPr>
         <p:spPr>
           <a:xfrm>
-            <a:off x="6035040" y="3758184"/>
-            <a:ext cx="5394960" cy="713232"/>
+            <a:off x="5958687" y="3758184"/>
+            <a:ext cx="5303520" cy="713232"/>
           </a:xfrm>
           <a:prstGeom prst="rect">
             <a:avLst/>
@@ -6619,7 +6618,7 @@
         </p:nvSpPr>
         <p:spPr>
           <a:xfrm>
-            <a:off x="731520" y="4599432"/>
+            <a:off x="655167" y="4599432"/>
             <a:ext cx="10881360" cy="713232"/>
           </a:xfrm>
           <a:prstGeom prst="roundRect">
@@ -6665,8 +6664,8 @@
         </p:nvSpPr>
         <p:spPr>
           <a:xfrm>
-            <a:off x="1005840" y="4599432"/>
-            <a:ext cx="4846320" cy="713232"/>
+            <a:off x="929487" y="4599432"/>
+            <a:ext cx="4754880" cy="713232"/>
           </a:xfrm>
           <a:prstGeom prst="rect">
             <a:avLst/>
@@ -6700,8 +6699,8 @@
         </p:nvSpPr>
         <p:spPr>
           <a:xfrm>
-            <a:off x="6035040" y="4599432"/>
-            <a:ext cx="5394960" cy="713232"/>
+            <a:off x="5958687" y="4599432"/>
+            <a:ext cx="5303520" cy="713232"/>
           </a:xfrm>
           <a:prstGeom prst="rect">
             <a:avLst/>
@@ -6735,7 +6734,7 @@
         </p:nvSpPr>
         <p:spPr>
           <a:xfrm>
-            <a:off x="731520" y="5440680"/>
+            <a:off x="655167" y="5440680"/>
             <a:ext cx="10881360" cy="713232"/>
           </a:xfrm>
           <a:prstGeom prst="roundRect">
@@ -6781,8 +6780,8 @@
         </p:nvSpPr>
         <p:spPr>
           <a:xfrm>
-            <a:off x="1005840" y="5440680"/>
-            <a:ext cx="4846320" cy="713232"/>
+            <a:off x="929487" y="5440680"/>
+            <a:ext cx="4754880" cy="713232"/>
           </a:xfrm>
           <a:prstGeom prst="rect">
             <a:avLst/>
@@ -6816,8 +6815,8 @@
         </p:nvSpPr>
         <p:spPr>
           <a:xfrm>
-            <a:off x="6035040" y="5440680"/>
-            <a:ext cx="5394960" cy="713232"/>
+            <a:off x="5958687" y="5440680"/>
+            <a:ext cx="5303520" cy="713232"/>
           </a:xfrm>
           <a:prstGeom prst="rect">
             <a:avLst/>

--- a/docs/휴가증 자동 반영 프로그램 안내 (서무용).pptx
+++ b/docs/휴가증 자동 반영 프로그램 안내 (서무용).pptx
@@ -3167,7 +3167,7 @@
                 </a:solidFill>
                 <a:latin typeface="맑은 고딕"/>
               </a:rPr>
-              <a:t>COSMAX · 생산3팀 파우더 성형실</a:t>
+              <a:t>COSMAX</a:t>
             </a:r>
           </a:p>
         </p:txBody>
@@ -3351,7 +3351,7 @@
                 </a:solidFill>
                 <a:latin typeface="맑은 고딕"/>
               </a:rPr>
-              <a:t>발행: 2026-08-26  ·  담당: 이동준</a:t>
+              <a:t>발행: 2026-08-26</a:t>
             </a:r>
           </a:p>
         </p:txBody>
@@ -4136,7 +4136,7 @@
                 </a:solidFill>
                 <a:latin typeface="맑은 고딕"/>
               </a:rPr>
-              <a:t>COSMAX · 생산3팀 파우더 성형실    |    2 / 6</a:t>
+              <a:t>COSMAX    |    2 / 6</a:t>
             </a:r>
           </a:p>
         </p:txBody>
@@ -4702,7 +4702,7 @@
                 </a:solidFill>
                 <a:latin typeface="맑은 고딕"/>
               </a:rPr>
-              <a:t>COSMAX · 생산3팀 파우더 성형실    |    3 / 6</a:t>
+              <a:t>COSMAX    |    3 / 6</a:t>
             </a:r>
           </a:p>
         </p:txBody>
@@ -5187,7 +5187,7 @@
                 </a:solidFill>
                 <a:latin typeface="맑은 고딕"/>
               </a:rPr>
-              <a:t>COSMAX · 생산3팀 파우더 성형실    |    4 / 6</a:t>
+              <a:t>COSMAX    |    4 / 6</a:t>
             </a:r>
           </a:p>
         </p:txBody>
@@ -6044,7 +6044,7 @@
                 </a:solidFill>
                 <a:latin typeface="맑은 고딕"/>
               </a:rPr>
-              <a:t>COSMAX · 생산3팀 파우더 성형실    |    5 / 6</a:t>
+              <a:t>COSMAX    |    5 / 6</a:t>
             </a:r>
           </a:p>
         </p:txBody>
@@ -6872,7 +6872,7 @@
                 </a:solidFill>
                 <a:latin typeface="맑은 고딕"/>
               </a:rPr>
-              <a:t>COSMAX · 생산3팀 파우더 성형실    |    6 / 6</a:t>
+              <a:t>COSMAX    |    6 / 6</a:t>
             </a:r>
           </a:p>
         </p:txBody>
